--- a/CopilotBrief_Submission.pptx
+++ b/CopilotBrief_Submission.pptx
@@ -13203,7 +13203,7 @@
                 <a:cs typeface="Calibri"/>
                 <a:sym typeface="Calibri"/>
               </a:rPr>
-              <a:t>College Name - [FILL IN: your college name]</a:t>
+              <a:t>College Name - SRM Institute of Science and Technology</a:t>
             </a:r>
             <a:endParaRPr/>
           </a:p>
@@ -15067,13 +15067,25 @@
           <a:p>
             <a:pPr/>
             <a:r>
+              <a:t>Innovation: negation-aware grounding — a short, lexically-dense NEGATIVE corpus sentence no longer outranks the actual answer to a positive question (regression-tested; see benchmark/report.md edge case #1).</a:t>
+            </a:r>
+          </a:p>
+          <a:p>
+            <a:pPr/>
+            <a:r>
+              <a:t>Innovation: refinement-target ambiguity is surfaced, not silent — when 2+ open topics exist and a late constraint has no signal tying it to one, the dashboard now shows which topic was assumed instead of guessing invisibly (edge case #2).</a:t>
+            </a:r>
+          </a:p>
+          <a:p>
+            <a:pPr/>
+            <a:r>
               <a:t>Results: Gate G2 Early Retrieval 1.0 (3/3), Gate G3 Multi-Intent 1.0 (5/5), Gate G4 Factual Grounding 0.944 support / 0 hallucinated citations, Gate G5 Session Refinement pass, Gate G6 100% telemetry coverage.</a:t>
             </a:r>
           </a:p>
           <a:p>
             <a:pPr/>
             <a:r>
-              <a:t>Limitations (documented + reproduced in benchmark/report.md): negation-sensitive lexical grounding, refinement-target ambiguity across concurrent claims, TF-IDF fallback discrimination on a small corpus.</a:t>
+              <a:t>Remaining limitation (documented + reproduced in benchmark/report.md): TF-IDF fallback discrimination on a small corpus when no network is available to cache the dense embedding model.</a:t>
             </a:r>
           </a:p>
         </p:txBody>
@@ -15218,13 +15230,13 @@
           <a:p>
             <a:pPr/>
             <a:r>
-              <a:t>Add negation-aware sentence scoring to fix the one documented grounding edge case.</a:t>
+              <a:t>Replace the negation-mismatch heuristic with a proper NLI-style entailment check for full polarity understanding, not just lexical-overlap demotion.</a:t>
             </a:r>
           </a:p>
           <a:p>
             <a:pPr/>
             <a:r>
-              <a:t>Multi-turn refinement disambiguation when 2+ claims could plausibly be the refinement target.</a:t>
+              <a:t>Add a real clarification-request turn for refinement-target ambiguity (right now it's surfaced to the user, not yet resolved by asking back).</a:t>
             </a:r>
           </a:p>
           <a:p>

--- a/CopilotBrief_Submission.pptx
+++ b/CopilotBrief_Submission.pptx
@@ -13174,7 +13174,7 @@
                 <a:cs typeface="Calibri"/>
                 <a:sym typeface="Calibri"/>
               </a:rPr>
-              <a:t>Team Name - [FILL IN: your registered team name]</a:t>
+              <a:t>Team Name - GEN CODERS</a:t>
             </a:r>
             <a:endParaRPr/>
           </a:p>
@@ -13232,7 +13232,7 @@
                 <a:cs typeface="Calibri"/>
                 <a:sym typeface="Calibri"/>
               </a:rPr>
-              <a:t>Member Name &amp; Email 1- Akarsh Nehra, akarshnehra@gmail.com</a:t>
+              <a:t>Member Name &amp; Email 1- Shashank Bhadoriya, sb9909@srmist.edu.in (Team Representative)</a:t>
             </a:r>
             <a:endParaRPr/>
           </a:p>
@@ -13261,7 +13261,7 @@
                 <a:cs typeface="Calibri"/>
                 <a:sym typeface="Calibri"/>
               </a:rPr>
-              <a:t>Member Name &amp; Email 2- [FILL IN]</a:t>
+              <a:t>Member Name &amp; Email 2- Akarsh Nehra, an3170@srmist.edu.in</a:t>
             </a:r>
             <a:endParaRPr/>
           </a:p>
@@ -13290,7 +13290,7 @@
                 <a:cs typeface="Calibri"/>
                 <a:sym typeface="Calibri"/>
               </a:rPr>
-              <a:t>Member Name &amp; Email 3- [FILL IN]</a:t>
+              <a:t>Member Name &amp; Email 3- Anirudh Verma</a:t>
             </a:r>
             <a:endParaRPr/>
           </a:p>
@@ -13319,7 +13319,7 @@
                 <a:cs typeface="Calibri"/>
                 <a:sym typeface="Calibri"/>
               </a:rPr>
-              <a:t>Member Name &amp; Email 4- [FILL IN]</a:t>
+              <a:t>Member Name &amp; Email 4- Abhay Goyal, ag1795@srmist.edu.in</a:t>
             </a:r>
             <a:endParaRPr/>
           </a:p>
@@ -13766,7 +13766,7 @@
                 <a:cs typeface="Calibri"/>
                 <a:sym typeface="Calibri"/>
               </a:rPr>
-              <a:t>Demo video, max 5 minutes (YouTube or Drive link)  -&gt;  [FILL IN: add your recorded video link here]</a:t>
+              <a:t>Demo video, max 5 minutes (YouTube or Drive link)  -&gt;  https://drive.google.com/file/d/1RJQC7AeVedlukw_frnN3c7o57puREqi4/view?usp=sharing</a:t>
             </a:r>
             <a:endParaRPr sz="2800"/>
           </a:p>
